--- a/presentation_veille_JO.pptx
+++ b/presentation_veille_JO.pptx
@@ -3188,7 +3188,7 @@
                 </a:solidFill>
                 <a:latin typeface="Arial"/>
               </a:rPr>
-              <a:t>CEPS — Comité économique des produits de santé  ·  22 juillet 2026</a:t>
+              <a:t>CEPS — Comité économique des produits de santé  ·  29 juillet 2026</a:t>
             </a:r>
           </a:p>
         </p:txBody>
@@ -3533,7 +3533,7 @@
                 </a:solidFill>
                 <a:latin typeface="Arial"/>
               </a:rPr>
-              <a:t>Veille JO, spécialités pharmaceutiques — 22/07/2026</a:t>
+              <a:t>Veille JO, spécialités pharmaceutiques — 29/07/2026</a:t>
             </a:r>
           </a:p>
         </p:txBody>
@@ -3784,7 +3784,7 @@
                 </a:solidFill>
                 <a:latin typeface="Arial"/>
               </a:rPr>
-              <a:t>107 textes le 28/05</a:t>
+              <a:t>182 textes le 23/07</a:t>
             </a:r>
           </a:p>
         </p:txBody>
@@ -3996,7 +3996,7 @@
                 </a:solidFill>
                 <a:latin typeface="Arial"/>
               </a:rPr>
-              <a:t>21 retenus, 86 écartés</a:t>
+              <a:t>40 retenus, 142 écartés</a:t>
             </a:r>
           </a:p>
         </p:txBody>
@@ -4153,7 +4153,7 @@
                 </a:solidFill>
                 <a:latin typeface="Arial"/>
               </a:rPr>
-              <a:t>Type de texte, présentations (code CIP), laboratoires, prix (PFHT), taux et indications lus dans les textes.</a:t>
+              <a:t>Type de texte, listes visées, produits et leurs codes (CIP/UCD), laboratoires, taux et indications lus dans les textes.</a:t>
             </a:r>
           </a:p>
         </p:txBody>
@@ -4365,7 +4365,7 @@
                 </a:solidFill>
                 <a:latin typeface="Arial"/>
               </a:rPr>
-              <a:t>Une ligne par présentation (clé CIP) : Liste ← arrêtés, Prix ← avis, Taux ← décision UNCAM.</a:t>
+              <a:t>Une ligne par médicament et par laboratoire : Liste ← arrêtés, Prix ← avis, Taux ← décision UNCAM.</a:t>
             </a:r>
           </a:p>
         </p:txBody>
@@ -4420,7 +4420,7 @@
                 </a:solidFill>
                 <a:latin typeface="Arial"/>
               </a:rPr>
-              <a:t>39 lignes, 8 produits</a:t>
+              <a:t>22 lignes, 0 anomalie</a:t>
             </a:r>
           </a:p>
         </p:txBody>
@@ -5066,7 +5066,7 @@
                 </a:solidFill>
                 <a:latin typeface="Arial"/>
               </a:rPr>
-              <a:t>Veille JO, spécialités pharmaceutiques — 22/07/2026</a:t>
+              <a:t>Veille JO, spécialités pharmaceutiques — 29/07/2026</a:t>
             </a:r>
           </a:p>
         </p:txBody>
@@ -5144,7 +5144,7 @@
                 </a:solidFill>
                 <a:latin typeface="Arial"/>
               </a:rPr>
-              <a:t>Exemple réel : JO du 28 mai 2026, utilisé pour la recette.</a:t>
+              <a:t>Exemple réel : JO du 23 juillet 2026, la newsletter de référence du CEPS.</a:t>
             </a:r>
           </a:p>
         </p:txBody>
@@ -5199,7 +5199,7 @@
                 </a:solidFill>
                 <a:latin typeface="Arial"/>
               </a:rPr>
-              <a:t>107 textes</a:t>
+              <a:t>182 textes</a:t>
             </a:r>
           </a:p>
           <a:p>
@@ -5266,7 +5266,7 @@
                 </a:solidFill>
                 <a:latin typeface="Arial"/>
               </a:rPr>
-              <a:t>21 textes</a:t>
+              <a:t>40 textes</a:t>
             </a:r>
           </a:p>
           <a:p>
@@ -5333,7 +5333,7 @@
                 </a:solidFill>
                 <a:latin typeface="Arial"/>
               </a:rPr>
-              <a:t>39 lignes</a:t>
+              <a:t>22 lignes</a:t>
             </a:r>
           </a:p>
           <a:p>
@@ -5345,7 +5345,7 @@
                 </a:solidFill>
                 <a:latin typeface="Arial"/>
               </a:rPr>
-              <a:t>8 produits, une ligne par présentation</a:t>
+              <a:t>11 inscriptions, 10 libellés, 1 extension</a:t>
             </a:r>
           </a:p>
         </p:txBody>
@@ -5462,7 +5462,7 @@
                 </a:solidFill>
                 <a:latin typeface="Arial"/>
               </a:rPr>
-              <a:t>Autant de lignes que le JO en publie : le « nom racine » relie les textes entre eux et regroupe les présentations d'un même produit.</a:t>
+              <a:t>Une ligne par médicament et par laboratoire : le « nom racine » et les codes CIP/UCD relient les textes du jour et regroupent les dosages d'un même produit.</a:t>
             </a:r>
           </a:p>
         </p:txBody>
@@ -5635,7 +5635,7 @@
                 </a:solidFill>
                 <a:latin typeface="Arial"/>
               </a:rPr>
-              <a:t> (ni hausse ni baisse dans le texte) : classé « Hausses de prix » avec la mention « à vérifier », signalé dans le récapitulatif du mail.</a:t>
+              <a:t> (ni hausse ni baisse dans le texte) : orienté par comparaison au dernier prix connu ; à défaut « Hausses de prix (à vérifier) », signalé dans le récapitulatif du mail.</a:t>
             </a:r>
           </a:p>
           <a:p>
@@ -5663,7 +5663,7 @@
                 </a:solidFill>
                 <a:latin typeface="Arial"/>
               </a:rPr>
-              <a:t>Plusieurs présentations d'un même produit</a:t>
+              <a:t>Plusieurs dosages d'un même médicament</a:t>
             </a:r>
             <a:r>
               <a:rPr sz="1150" b="0" i="0">
@@ -5672,7 +5672,7 @@
                 </a:solidFill>
                 <a:latin typeface="Arial"/>
               </a:rPr>
-              <a:t> : une ligne chacune, avec son prix ; laboratoire, indication et liste fusionnés visuellement.</a:t>
+              <a:t> : une seule ligne, prix et taux en liens vers les textes ; un générique vendu par plusieurs laboratoires garde une ligne par laboratoire.</a:t>
             </a:r>
           </a:p>
         </p:txBody>
@@ -5894,7 +5894,7 @@
                 </a:solidFill>
                 <a:latin typeface="Arial"/>
               </a:rPr>
-              <a:t>Veille JO, spécialités pharmaceutiques — 22/07/2026</a:t>
+              <a:t>Veille JO, spécialités pharmaceutiques — 29/07/2026</a:t>
             </a:r>
           </a:p>
         </p:txBody>
@@ -6113,7 +6113,7 @@
                 </a:solidFill>
                 <a:latin typeface="Arial"/>
               </a:rPr>
-              <a:t>Produits, prix, taux, listes : lus dans les tableaux du JO ; indications recopiées, pas réécrites</a:t>
+              <a:t>Produits, laboratoires, listes, taux : lus dans les tableaux du JO ; indications recopiées, pas réécrites</a:t>
             </a:r>
           </a:p>
           <a:p>
@@ -6877,7 +6877,7 @@
                 </a:solidFill>
                 <a:latin typeface="Arial"/>
               </a:rPr>
-              <a:t>API officielle Légifrance (PISTE), pas d'aspiration du site</a:t>
+              <a:t>Deux flux publics et officiels : API Légifrance (PISTE) et base publique des médicaments — pas d'aspiration de site</a:t>
             </a:r>
           </a:p>
         </p:txBody>
@@ -7099,7 +7099,7 @@
                 </a:solidFill>
                 <a:latin typeface="Arial"/>
               </a:rPr>
-              <a:t>Veille JO, spécialités pharmaceutiques — 22/07/2026</a:t>
+              <a:t>Veille JO, spécialités pharmaceutiques — 29/07/2026</a:t>
             </a:r>
           </a:p>
         </p:txBody>
@@ -7919,7 +7919,7 @@
                 </a:solidFill>
                 <a:latin typeface="Arial"/>
               </a:rPr>
-              <a:t>Le format du 22/07 : une ligne par présentation, prix affiché, fusions par produit — sur les fichiers générés</a:t>
+              <a:t>L'orientation automatique des avis de prix « neutres » par comparaison au dernier prix connu (base publique des médicaments)</a:t>
             </a:r>
           </a:p>
         </p:txBody>
@@ -8057,7 +8057,7 @@
                 </a:solidFill>
                 <a:latin typeface="Arial"/>
               </a:rPr>
-              <a:t>La convention « Hausses (à vérifier) » pour les avis de prix non orientés (ou une section « à orienter » dédiée)</a:t>
+              <a:t>Le laboratoire à retenir sur un transfert d'exploitation, et les colonnes du tableau Radiations (aucun exemple dans vos mails)</a:t>
             </a:r>
           </a:p>
         </p:txBody>
